--- a/docs/presentations/SandFest-Board-Platform-Briefing.pptx
+++ b/docs/presentations/SandFest-Board-Platform-Briefing.pptx
@@ -1158,6 +1158,7 @@
               <a:rPr lang="en-US" dirty="0"/>
               <a:t>This is the core evidence slide.
 Call out that every journey restores the same 12-of-12 baseline before the next journey begins.
+Operations also shows per-journey evidence counts and runtime so the proof is inspectable during Q and A.
 [Sources]
 - Internal: .sandfest-runtime/board-capability-certification.json</a:t>
             </a:r>
@@ -6039,7 +6040,7 @@
                 <a:ea typeface="Calibri" pitchFamily="34" charset="-122"/>
                 <a:cs typeface="Calibri" pitchFamily="34" charset="-120"/>
               </a:rPr>
-              <a:t>10/10 journeys · Chromium 14/14 · WebKit 14/14 · baseline restored</a:t>
+              <a:t>10/10 journeys · exact baseline restoration · per-journey evidence counts</a:t>
             </a:r>
             <a:endParaRPr lang="en-US" sz="1050" dirty="0"/>
           </a:p>
